--- a/examples/ppt/charts/charts-combo.pptx
+++ b/examples/ppt/charts/charts-combo.pptx
@@ -5,14 +5,14 @@
     <p:sldMasterId xmlns:r="http://schemas.openxmlformats.org/officeDocument/2006/relationships" id="2147483648" r:id="rId1"/>
   </p:sldMasterIdLst>
   <p:sldIdLst>
-    <p:sldId id="256" r:id="R904b4d346b154d97"/>
-    <p:sldId id="257" r:id="R497e052364ac435b"/>
-    <p:sldId id="258" r:id="R4a7059960bb94a9d"/>
-    <p:sldId id="259" r:id="Rde1407f16f374ccb"/>
-    <p:sldId id="260" r:id="R4341c35059804e40"/>
-    <p:sldId id="261" r:id="Rdca0e288340d4ab6"/>
-    <p:sldId id="262" r:id="R252cb32ffc47459a"/>
-    <p:sldId id="263" r:id="Rc01868b5c5b6463a"/>
+    <p:sldId id="256" r:id="R632ee74c2c414a29"/>
+    <p:sldId id="257" r:id="R1b9c7740275d4952"/>
+    <p:sldId id="258" r:id="Rfea2d55d11784bc7"/>
+    <p:sldId id="259" r:id="Rb45c939dbf74450c"/>
+    <p:sldId id="260" r:id="R5b9ed31125844054"/>
+    <p:sldId id="261" r:id="R72faea05b7af42c9"/>
+    <p:sldId id="262" r:id="Reee3f5c09d5c4f18"/>
+    <p:sldId id="263" r:id="Rc8b30110d3d240ad"/>
   </p:sldIdLst>
   <p:sldSz cx="12192000" cy="6858000"/>
   <p:notesSz cx="6858000" cy="9144000"/>
@@ -287,7 +287,7 @@
 </file>
 
 <file path=ppt/slideMasters/slideMaster1.xml><?xml version="1.0" encoding="utf-8"?>
-<p:sldMaster xmlns:p="http://schemas.openxmlformats.org/presentationml/2006/main">
+<p:sldMaster xmlns:r="http://schemas.openxmlformats.org/officeDocument/2006/relationships" xmlns:p="http://schemas.openxmlformats.org/presentationml/2006/main">
   <p:cSld>
     <p:spTree>
       <p:nvGrpSpPr>
@@ -396,9 +396,11 @@
             <c:v>Growth %</c:v>
           </c:tx>
           <c:spPr>
-            <a:solidFill xmlns:a="http://schemas.openxmlformats.org/drawingml/2006/main">
-              <a:srgbClr val="ED7D31"/>
-            </a:solidFill>
+            <a:ln xmlns:a="http://schemas.openxmlformats.org/drawingml/2006/main" w="25400">
+              <a:solidFill>
+                <a:srgbClr val="ED7D31"/>
+              </a:solidFill>
+            </a:ln>
           </c:spPr>
           <c:cat>
             <c:strLit>
@@ -609,12 +611,6 @@
       <c:lineChart>
         <c:grouping val="standard"/>
         <c:varyColors val="0"/>
-        <c:axId val="1"/>
-        <c:axId val="2"/>
-      </c:lineChart>
-      <c:lineChart>
-        <c:grouping val="standard"/>
-        <c:varyColors val="0"/>
         <c:ser>
           <c:idx val="2"/>
           <c:order val="2"/>
@@ -622,9 +618,11 @@
             <c:v>Growth %</c:v>
           </c:tx>
           <c:spPr>
-            <a:solidFill xmlns:a="http://schemas.openxmlformats.org/drawingml/2006/main">
-              <a:srgbClr val="A5A5A5"/>
-            </a:solidFill>
+            <a:ln xmlns:a="http://schemas.openxmlformats.org/drawingml/2006/main" w="25400">
+              <a:solidFill>
+                <a:srgbClr val="A5A5A5"/>
+              </a:solidFill>
+            </a:ln>
           </c:spPr>
           <c:cat>
             <c:strLit>
@@ -816,12 +814,6 @@
       <c:lineChart>
         <c:grouping val="standard"/>
         <c:varyColors val="0"/>
-        <c:axId val="1"/>
-        <c:axId val="2"/>
-      </c:lineChart>
-      <c:lineChart>
-        <c:grouping val="standard"/>
-        <c:varyColors val="0"/>
         <c:ser>
           <c:idx val="1"/>
           <c:order val="1"/>
@@ -829,9 +821,11 @@
             <c:v>Cost</c:v>
           </c:tx>
           <c:spPr>
-            <a:solidFill xmlns:a="http://schemas.openxmlformats.org/drawingml/2006/main">
-              <a:srgbClr val="ED7D31"/>
-            </a:solidFill>
+            <a:ln xmlns:a="http://schemas.openxmlformats.org/drawingml/2006/main" w="25400">
+              <a:solidFill>
+                <a:srgbClr val="ED7D31"/>
+              </a:solidFill>
+            </a:ln>
           </c:spPr>
           <c:cat>
             <c:strLit>
@@ -876,9 +870,11 @@
             <c:v>Growth %</c:v>
           </c:tx>
           <c:spPr>
-            <a:solidFill xmlns:a="http://schemas.openxmlformats.org/drawingml/2006/main">
-              <a:srgbClr val="A5A5A5"/>
-            </a:solidFill>
+            <a:ln xmlns:a="http://schemas.openxmlformats.org/drawingml/2006/main" w="25400">
+              <a:solidFill>
+                <a:srgbClr val="A5A5A5"/>
+              </a:solidFill>
+            </a:ln>
           </c:spPr>
           <c:cat>
             <c:strLit>
@@ -1070,12 +1066,6 @@
       <c:lineChart>
         <c:grouping val="standard"/>
         <c:varyColors val="0"/>
-        <c:axId val="1"/>
-        <c:axId val="2"/>
-      </c:lineChart>
-      <c:lineChart>
-        <c:grouping val="standard"/>
-        <c:varyColors val="0"/>
         <c:ser>
           <c:idx val="1"/>
           <c:order val="1"/>
@@ -1083,9 +1073,11 @@
             <c:v>Growth %</c:v>
           </c:tx>
           <c:spPr>
-            <a:solidFill xmlns:a="http://schemas.openxmlformats.org/drawingml/2006/main">
-              <a:srgbClr val="ED7D31"/>
-            </a:solidFill>
+            <a:ln xmlns:a="http://schemas.openxmlformats.org/drawingml/2006/main" w="25400">
+              <a:solidFill>
+                <a:srgbClr val="ED7D31"/>
+              </a:solidFill>
+            </a:ln>
           </c:spPr>
           <c:cat>
             <c:strLit>
@@ -1358,9 +1350,11 @@
             <c:v>Growth %</c:v>
           </c:tx>
           <c:spPr>
-            <a:solidFill xmlns:a="http://schemas.openxmlformats.org/drawingml/2006/main">
-              <a:srgbClr val="ED7D31"/>
-            </a:solidFill>
+            <a:ln xmlns:a="http://schemas.openxmlformats.org/drawingml/2006/main" w="25400">
+              <a:solidFill>
+                <a:srgbClr val="ED7D31"/>
+              </a:solidFill>
+            </a:ln>
           </c:spPr>
           <c:cat>
             <c:strLit>
@@ -1531,9 +1525,11 @@
             <c:v>Growth %</c:v>
           </c:tx>
           <c:spPr>
-            <a:solidFill xmlns:a="http://schemas.openxmlformats.org/drawingml/2006/main">
-              <a:srgbClr val="ED7D31"/>
-            </a:solidFill>
+            <a:ln xmlns:a="http://schemas.openxmlformats.org/drawingml/2006/main" w="25400">
+              <a:solidFill>
+                <a:srgbClr val="ED7D31"/>
+              </a:solidFill>
+            </a:ln>
           </c:spPr>
           <c:cat>
             <c:strLit>
@@ -1719,9 +1715,11 @@
             <c:v>Growth %</c:v>
           </c:tx>
           <c:spPr>
-            <a:solidFill xmlns:a="http://schemas.openxmlformats.org/drawingml/2006/main">
-              <a:srgbClr val="ED7D31"/>
-            </a:solidFill>
+            <a:ln xmlns:a="http://schemas.openxmlformats.org/drawingml/2006/main" w="25400">
+              <a:solidFill>
+                <a:srgbClr val="ED7D31"/>
+              </a:solidFill>
+            </a:ln>
           </c:spPr>
           <c:cat>
             <c:strLit>
@@ -1875,9 +1873,11 @@
             <c:v>Growth %</c:v>
           </c:tx>
           <c:spPr>
-            <a:solidFill xmlns:a="http://schemas.openxmlformats.org/drawingml/2006/main">
-              <a:srgbClr val="ED7D31"/>
-            </a:solidFill>
+            <a:ln xmlns:a="http://schemas.openxmlformats.org/drawingml/2006/main" w="25400">
+              <a:solidFill>
+                <a:srgbClr val="ED7D31"/>
+              </a:solidFill>
+            </a:ln>
           </c:spPr>
           <c:cat>
             <c:strLit>
@@ -2031,6 +2031,13 @@
             </c:numLit>
           </c:val>
         </c:ser>
+        <c:dLbls>
+          <c:showLegendKey val="0"/>
+          <c:showVal val="1"/>
+          <c:showCatName val="0"/>
+          <c:showSerName val="0"/>
+          <c:showPercent val="0"/>
+        </c:dLbls>
         <c:axId val="1"/>
         <c:axId val="2"/>
       </c:barChart>
@@ -2044,9 +2051,11 @@
             <c:v>Growth %</c:v>
           </c:tx>
           <c:spPr>
-            <a:solidFill xmlns:a="http://schemas.openxmlformats.org/drawingml/2006/main">
-              <a:srgbClr val="ED7D31"/>
-            </a:solidFill>
+            <a:ln xmlns:a="http://schemas.openxmlformats.org/drawingml/2006/main" w="25400">
+              <a:solidFill>
+                <a:srgbClr val="ED7D31"/>
+              </a:solidFill>
+            </a:ln>
           </c:spPr>
           <c:cat>
             <c:strLit>
@@ -2084,6 +2093,13 @@
             </c:numLit>
           </c:val>
         </c:ser>
+        <c:dLbls>
+          <c:showLegendKey val="0"/>
+          <c:showVal val="1"/>
+          <c:showCatName val="0"/>
+          <c:showSerName val="0"/>
+          <c:showPercent val="0"/>
+        </c:dLbls>
         <c:axId val="1"/>
         <c:axId val="2"/>
       </c:lineChart>
@@ -2204,6 +2220,13 @@
             </c:numLit>
           </c:val>
         </c:ser>
+        <c:dLbls>
+          <c:showLegendKey val="0"/>
+          <c:showVal val="1"/>
+          <c:showCatName val="0"/>
+          <c:showSerName val="1"/>
+          <c:showPercent val="0"/>
+        </c:dLbls>
         <c:axId val="1"/>
         <c:axId val="2"/>
       </c:barChart>
@@ -2217,9 +2240,11 @@
             <c:v>Growth %</c:v>
           </c:tx>
           <c:spPr>
-            <a:solidFill xmlns:a="http://schemas.openxmlformats.org/drawingml/2006/main">
-              <a:srgbClr val="ED7D31"/>
-            </a:solidFill>
+            <a:ln xmlns:a="http://schemas.openxmlformats.org/drawingml/2006/main" w="25400">
+              <a:solidFill>
+                <a:srgbClr val="ED7D31"/>
+              </a:solidFill>
+            </a:ln>
           </c:spPr>
           <c:cat>
             <c:strLit>
@@ -2257,6 +2282,13 @@
             </c:numLit>
           </c:val>
         </c:ser>
+        <c:dLbls>
+          <c:showLegendKey val="0"/>
+          <c:showVal val="1"/>
+          <c:showCatName val="0"/>
+          <c:showSerName val="1"/>
+          <c:showPercent val="0"/>
+        </c:dLbls>
         <c:axId val="1"/>
         <c:axId val="2"/>
       </c:lineChart>
@@ -2390,9 +2422,11 @@
             <c:v>Growth %</c:v>
           </c:tx>
           <c:spPr>
-            <a:solidFill xmlns:a="http://schemas.openxmlformats.org/drawingml/2006/main">
-              <a:srgbClr val="ED7D31"/>
-            </a:solidFill>
+            <a:ln xmlns:a="http://schemas.openxmlformats.org/drawingml/2006/main" w="25400">
+              <a:solidFill>
+                <a:srgbClr val="ED7D31"/>
+              </a:solidFill>
+            </a:ln>
           </c:spPr>
           <c:cat>
             <c:strLit>
@@ -2723,6 +2757,28 @@
             </c:numLit>
           </c:val>
         </c:ser>
+        <c:dLbls>
+          <c:txPr>
+            <a:bodyPr xmlns:a="http://schemas.openxmlformats.org/drawingml/2006/main"/>
+            <a:lstStyle xmlns:a="http://schemas.openxmlformats.org/drawingml/2006/main"/>
+            <a:p xmlns:a="http://schemas.openxmlformats.org/drawingml/2006/main">
+              <a:pPr>
+                <a:defRPr sz="1000">
+                  <a:solidFill>
+                    <a:srgbClr val="C00000"/>
+                  </a:solidFill>
+                  <a:latin typeface="Georgia"/>
+                  <a:ea typeface="Georgia"/>
+                </a:defRPr>
+              </a:pPr>
+            </a:p>
+          </c:txPr>
+          <c:showLegendKey val="0"/>
+          <c:showVal val="1"/>
+          <c:showCatName val="0"/>
+          <c:showSerName val="0"/>
+          <c:showPercent val="0"/>
+        </c:dLbls>
         <c:axId val="1"/>
         <c:axId val="2"/>
       </c:barChart>
@@ -2736,9 +2792,11 @@
             <c:v>Growth %</c:v>
           </c:tx>
           <c:spPr>
-            <a:solidFill xmlns:a="http://schemas.openxmlformats.org/drawingml/2006/main">
-              <a:srgbClr val="ED7D31"/>
-            </a:solidFill>
+            <a:ln xmlns:a="http://schemas.openxmlformats.org/drawingml/2006/main" w="25400">
+              <a:solidFill>
+                <a:srgbClr val="ED7D31"/>
+              </a:solidFill>
+            </a:ln>
           </c:spPr>
           <c:cat>
             <c:strLit>
@@ -2776,6 +2834,28 @@
             </c:numLit>
           </c:val>
         </c:ser>
+        <c:dLbls>
+          <c:txPr>
+            <a:bodyPr xmlns:a="http://schemas.openxmlformats.org/drawingml/2006/main"/>
+            <a:lstStyle xmlns:a="http://schemas.openxmlformats.org/drawingml/2006/main"/>
+            <a:p xmlns:a="http://schemas.openxmlformats.org/drawingml/2006/main">
+              <a:pPr>
+                <a:defRPr sz="1000">
+                  <a:solidFill>
+                    <a:srgbClr val="C00000"/>
+                  </a:solidFill>
+                  <a:latin typeface="Georgia"/>
+                  <a:ea typeface="Georgia"/>
+                </a:defRPr>
+              </a:pPr>
+            </a:p>
+          </c:txPr>
+          <c:showLegendKey val="0"/>
+          <c:showVal val="1"/>
+          <c:showCatName val="0"/>
+          <c:showSerName val="0"/>
+          <c:showPercent val="0"/>
+        </c:dLbls>
         <c:axId val="1"/>
         <c:axId val="2"/>
       </c:lineChart>
@@ -2902,12 +2982,6 @@
       <c:lineChart>
         <c:grouping val="standard"/>
         <c:varyColors val="0"/>
-        <c:axId val="1"/>
-        <c:axId val="2"/>
-      </c:lineChart>
-      <c:lineChart>
-        <c:grouping val="standard"/>
-        <c:varyColors val="0"/>
         <c:ser>
           <c:idx val="1"/>
           <c:order val="1"/>
@@ -2915,9 +2989,11 @@
             <c:v>Growth %</c:v>
           </c:tx>
           <c:spPr>
-            <a:solidFill xmlns:a="http://schemas.openxmlformats.org/drawingml/2006/main">
-              <a:srgbClr val="ED7D31"/>
-            </a:solidFill>
+            <a:ln xmlns:a="http://schemas.openxmlformats.org/drawingml/2006/main" w="25400">
+              <a:solidFill>
+                <a:srgbClr val="ED7D31"/>
+              </a:solidFill>
+            </a:ln>
           </c:spPr>
           <c:cat>
             <c:strLit>
@@ -3214,9 +3290,11 @@
             <c:v>Growth %</c:v>
           </c:tx>
           <c:spPr>
-            <a:solidFill xmlns:a="http://schemas.openxmlformats.org/drawingml/2006/main">
-              <a:srgbClr val="ED7D31"/>
-            </a:solidFill>
+            <a:ln xmlns:a="http://schemas.openxmlformats.org/drawingml/2006/main" w="25400">
+              <a:solidFill>
+                <a:srgbClr val="ED7D31"/>
+              </a:solidFill>
+            </a:ln>
           </c:spPr>
           <c:cat>
             <c:strLit>
@@ -3404,9 +3482,11 @@
             <c:v>Growth %</c:v>
           </c:tx>
           <c:spPr>
-            <a:solidFill xmlns:a="http://schemas.openxmlformats.org/drawingml/2006/main">
-              <a:srgbClr val="ED7D31"/>
-            </a:solidFill>
+            <a:ln xmlns:a="http://schemas.openxmlformats.org/drawingml/2006/main" w="25400">
+              <a:solidFill>
+                <a:srgbClr val="ED7D31"/>
+              </a:solidFill>
+            </a:ln>
           </c:spPr>
           <c:cat>
             <c:strLit>
@@ -3593,9 +3673,11 @@
             <c:v>Growth %</c:v>
           </c:tx>
           <c:spPr>
-            <a:solidFill xmlns:a="http://schemas.openxmlformats.org/drawingml/2006/main">
-              <a:srgbClr val="ED7D31"/>
-            </a:solidFill>
+            <a:ln xmlns:a="http://schemas.openxmlformats.org/drawingml/2006/main" w="25400">
+              <a:solidFill>
+                <a:srgbClr val="ED7D31"/>
+              </a:solidFill>
+            </a:ln>
           </c:spPr>
           <c:cat>
             <c:strLit>
@@ -3791,9 +3873,6 @@
             <c:v>Growth %</c:v>
           </c:tx>
           <c:spPr>
-            <a:solidFill xmlns:a="http://schemas.openxmlformats.org/drawingml/2006/main">
-              <a:srgbClr val="ED7D31"/>
-            </a:solidFill>
             <a:ln xmlns:a="http://schemas.openxmlformats.org/drawingml/2006/main" w="6350">
               <a:solidFill>
                 <a:srgbClr val="000000"/>
@@ -3995,6 +4074,11 @@
               </a:gsLst>
               <a:lin ang="0" scaled="1"/>
             </a:gradFill>
+            <a:ln xmlns:a="http://schemas.openxmlformats.org/drawingml/2006/main" w="25400">
+              <a:solidFill>
+                <a:srgbClr val="ED7D31"/>
+              </a:solidFill>
+            </a:ln>
             <a:effectLst xmlns:a="http://schemas.openxmlformats.org/drawingml/2006/main">
               <a:outerShdw blurRad="63500" dist="38100" dir="2700000" algn="tl" rotWithShape="0">
                 <a:srgbClr val="000000">
@@ -4174,11 +4258,11 @@
             <c:v>Growth %</c:v>
           </c:tx>
           <c:spPr>
-            <a:solidFill xmlns:a="http://schemas.openxmlformats.org/drawingml/2006/main">
-              <a:srgbClr val="ED7D31">
-                <a:alpha val="70000"/>
-              </a:srgbClr>
-            </a:solidFill>
+            <a:ln xmlns:a="http://schemas.openxmlformats.org/drawingml/2006/main" w="25400">
+              <a:solidFill>
+                <a:srgbClr val="ED7D31"/>
+              </a:solidFill>
+            </a:ln>
           </c:spPr>
           <c:cat>
             <c:strLit>
@@ -4368,6 +4452,11 @@
               </a:gsLst>
               <a:lin ang="0" scaled="1"/>
             </a:gradFill>
+            <a:ln xmlns:a="http://schemas.openxmlformats.org/drawingml/2006/main" w="25400">
+              <a:solidFill>
+                <a:srgbClr val="ED7D31"/>
+              </a:solidFill>
+            </a:ln>
           </c:spPr>
           <c:cat>
             <c:strLit>
@@ -4539,9 +4628,6 @@
             <c:v>Growth %</c:v>
           </c:tx>
           <c:spPr>
-            <a:solidFill xmlns:a="http://schemas.openxmlformats.org/drawingml/2006/main">
-              <a:srgbClr val="ED7D31"/>
-            </a:solidFill>
             <a:ln xmlns:a="http://schemas.openxmlformats.org/drawingml/2006/main" w="25400">
               <a:solidFill>
                 <a:srgbClr val="ED7D31"/>
@@ -4716,9 +4802,11 @@
             <c:v>Sales</c:v>
           </c:tx>
           <c:spPr>
-            <a:solidFill xmlns:a="http://schemas.openxmlformats.org/drawingml/2006/main">
-              <a:srgbClr val="4472C4"/>
-            </a:solidFill>
+            <a:ln xmlns:a="http://schemas.openxmlformats.org/drawingml/2006/main" w="25400">
+              <a:solidFill>
+                <a:srgbClr val="4472C4"/>
+              </a:solidFill>
+            </a:ln>
           </c:spPr>
           <c:cat>
             <c:strLit>
@@ -4947,9 +5035,6 @@
             <c:v>Growth %</c:v>
           </c:tx>
           <c:spPr>
-            <a:solidFill xmlns:a="http://schemas.openxmlformats.org/drawingml/2006/main">
-              <a:srgbClr val="FF6B6B"/>
-            </a:solidFill>
             <a:ln xmlns:a="http://schemas.openxmlformats.org/drawingml/2006/main" w="25400">
               <a:solidFill>
                 <a:srgbClr val="FF6B6B"/>
@@ -5206,9 +5291,6 @@
             <c:v>Growth %</c:v>
           </c:tx>
           <c:spPr>
-            <a:solidFill xmlns:a="http://schemas.openxmlformats.org/drawingml/2006/main">
-              <a:srgbClr val="44546A"/>
-            </a:solidFill>
             <a:ln xmlns:a="http://schemas.openxmlformats.org/drawingml/2006/main" w="25400">
               <a:solidFill>
                 <a:srgbClr val="44546A"/>
@@ -5456,9 +5538,6 @@
             <c:v>Renamed Growth</c:v>
           </c:tx>
           <c:spPr>
-            <a:solidFill xmlns:a="http://schemas.openxmlformats.org/drawingml/2006/main">
-              <a:srgbClr val="2E75B6"/>
-            </a:solidFill>
             <a:ln xmlns:a="http://schemas.openxmlformats.org/drawingml/2006/main" w="31750">
               <a:solidFill>
                 <a:srgbClr val="2E75B6"/>
@@ -5638,9 +5717,11 @@
             <c:v>Growth %</c:v>
           </c:tx>
           <c:spPr>
-            <a:solidFill xmlns:a="http://schemas.openxmlformats.org/drawingml/2006/main">
-              <a:srgbClr val="ED7D31"/>
-            </a:solidFill>
+            <a:ln xmlns:a="http://schemas.openxmlformats.org/drawingml/2006/main" w="25400">
+              <a:solidFill>
+                <a:srgbClr val="ED7D31"/>
+              </a:solidFill>
+            </a:ln>
           </c:spPr>
           <c:cat>
             <c:strLit>
@@ -5858,9 +5939,11 @@
             <c:v>Growth %</c:v>
           </c:tx>
           <c:spPr>
-            <a:solidFill xmlns:a="http://schemas.openxmlformats.org/drawingml/2006/main">
-              <a:srgbClr val="A5A5A5"/>
-            </a:solidFill>
+            <a:ln xmlns:a="http://schemas.openxmlformats.org/drawingml/2006/main" w="25400">
+              <a:solidFill>
+                <a:srgbClr val="A5A5A5"/>
+              </a:solidFill>
+            </a:ln>
           </c:spPr>
           <c:cat>
             <c:strLit>
@@ -6031,9 +6114,11 @@
             <c:v>Cost</c:v>
           </c:tx>
           <c:spPr>
-            <a:solidFill xmlns:a="http://schemas.openxmlformats.org/drawingml/2006/main">
-              <a:srgbClr val="ED7D31"/>
-            </a:solidFill>
+            <a:ln xmlns:a="http://schemas.openxmlformats.org/drawingml/2006/main" w="25400">
+              <a:solidFill>
+                <a:srgbClr val="ED7D31"/>
+              </a:solidFill>
+            </a:ln>
           </c:spPr>
           <c:cat>
             <c:strLit>
@@ -6078,9 +6163,11 @@
             <c:v>Growth %</c:v>
           </c:tx>
           <c:spPr>
-            <a:solidFill xmlns:a="http://schemas.openxmlformats.org/drawingml/2006/main">
-              <a:srgbClr val="A5A5A5"/>
-            </a:solidFill>
+            <a:ln xmlns:a="http://schemas.openxmlformats.org/drawingml/2006/main" w="25400">
+              <a:solidFill>
+                <a:srgbClr val="A5A5A5"/>
+              </a:solidFill>
+            </a:ln>
           </c:spPr>
           <c:cat>
             <c:strLit>
@@ -6197,9 +6284,11 @@
             <c:v>Sales</c:v>
           </c:tx>
           <c:spPr>
-            <a:solidFill xmlns:a="http://schemas.openxmlformats.org/drawingml/2006/main">
-              <a:srgbClr val="4472C4"/>
-            </a:solidFill>
+            <a:ln xmlns:a="http://schemas.openxmlformats.org/drawingml/2006/main" w="25400">
+              <a:solidFill>
+                <a:srgbClr val="4472C4"/>
+              </a:solidFill>
+            </a:ln>
           </c:spPr>
           <c:cat>
             <c:strLit>
@@ -6244,9 +6333,11 @@
             <c:v>Cost</c:v>
           </c:tx>
           <c:spPr>
-            <a:solidFill xmlns:a="http://schemas.openxmlformats.org/drawingml/2006/main">
-              <a:srgbClr val="ED7D31"/>
-            </a:solidFill>
+            <a:ln xmlns:a="http://schemas.openxmlformats.org/drawingml/2006/main" w="25400">
+              <a:solidFill>
+                <a:srgbClr val="ED7D31"/>
+              </a:solidFill>
+            </a:ln>
           </c:spPr>
           <c:cat>
             <c:strLit>
@@ -6524,9 +6615,11 @@
             <c:v>Growth %</c:v>
           </c:tx>
           <c:spPr>
-            <a:solidFill xmlns:a="http://schemas.openxmlformats.org/drawingml/2006/main">
-              <a:srgbClr val="A5A5A5"/>
-            </a:solidFill>
+            <a:ln xmlns:a="http://schemas.openxmlformats.org/drawingml/2006/main" w="25400">
+              <a:solidFill>
+                <a:srgbClr val="A5A5A5"/>
+              </a:solidFill>
+            </a:ln>
           </c:spPr>
           <c:cat>
             <c:strLit>
@@ -6690,12 +6783,6 @@
       <c:lineChart>
         <c:grouping val="standard"/>
         <c:varyColors val="0"/>
-        <c:axId val="1"/>
-        <c:axId val="2"/>
-      </c:lineChart>
-      <c:lineChart>
-        <c:grouping val="standard"/>
-        <c:varyColors val="0"/>
         <c:ser>
           <c:idx val="1"/>
           <c:order val="1"/>
@@ -6703,9 +6790,11 @@
             <c:v>Growth %</c:v>
           </c:tx>
           <c:spPr>
-            <a:solidFill xmlns:a="http://schemas.openxmlformats.org/drawingml/2006/main">
-              <a:srgbClr val="ED7D31"/>
-            </a:solidFill>
+            <a:ln xmlns:a="http://schemas.openxmlformats.org/drawingml/2006/main" w="25400">
+              <a:solidFill>
+                <a:srgbClr val="ED7D31"/>
+              </a:solidFill>
+            </a:ln>
           </c:spPr>
           <c:cat>
             <c:strLit>
@@ -6829,8 +6918,8 @@
       <p:grpSpPr/>
       <p:sp>
         <p:nvSpPr>
-          <p:cNvPr id="10000" name="TextBox 1"/>
-          <p:cNvSpPr/>
+          <p:cNvPr id="100000" name="TextBox 1"/>
+          <p:cNvSpPr txBox="1"/>
           <p:nvPr/>
         </p:nvSpPr>
         <p:spPr>
@@ -6857,7 +6946,7 @@
       </p:sp>
       <p:graphicFrame>
         <p:nvGraphicFramePr>
-          <p:cNvPr id="10001" name="column + line"/>
+          <p:cNvPr id="100001" name="column + line"/>
           <p:cNvGraphicFramePr/>
           <p:nvPr/>
         </p:nvGraphicFramePr>
@@ -6867,13 +6956,13 @@
         </p:xfrm>
         <a:graphic xmlns:a="http://schemas.openxmlformats.org/drawingml/2006/main">
           <a:graphicData uri="http://schemas.openxmlformats.org/drawingml/2006/chart">
-            <c:chart xmlns:r="http://schemas.openxmlformats.org/officeDocument/2006/relationships" xmlns:c="http://schemas.openxmlformats.org/drawingml/2006/chart" r:id="R5b00a280a0bd4a3e"/>
+            <c:chart xmlns:r="http://schemas.openxmlformats.org/officeDocument/2006/relationships" xmlns:c="http://schemas.openxmlformats.org/drawingml/2006/chart" r:id="R3b4bf78e8c354bfe"/>
           </a:graphicData>
         </a:graphic>
       </p:graphicFrame>
       <p:graphicFrame>
         <p:nvGraphicFramePr>
-          <p:cNvPr id="10002" name="column + area"/>
+          <p:cNvPr id="100002" name="column + area"/>
           <p:cNvGraphicFramePr/>
           <p:nvPr/>
         </p:nvGraphicFramePr>
@@ -6883,13 +6972,13 @@
         </p:xfrm>
         <a:graphic xmlns:a="http://schemas.openxmlformats.org/drawingml/2006/main">
           <a:graphicData uri="http://schemas.openxmlformats.org/drawingml/2006/chart">
-            <c:chart xmlns:r="http://schemas.openxmlformats.org/officeDocument/2006/relationships" xmlns:c="http://schemas.openxmlformats.org/drawingml/2006/chart" r:id="Rfc749ba5678641a1"/>
+            <c:chart xmlns:r="http://schemas.openxmlformats.org/officeDocument/2006/relationships" xmlns:c="http://schemas.openxmlformats.org/drawingml/2006/chart" r:id="Re4f347eb728c4685"/>
           </a:graphicData>
         </a:graphic>
       </p:graphicFrame>
       <p:graphicFrame>
         <p:nvGraphicFramePr>
-          <p:cNvPr id="10003" name="line + area"/>
+          <p:cNvPr id="100003" name="line + area"/>
           <p:cNvGraphicFramePr/>
           <p:nvPr/>
         </p:nvGraphicFramePr>
@@ -6899,13 +6988,13 @@
         </p:xfrm>
         <a:graphic xmlns:a="http://schemas.openxmlformats.org/drawingml/2006/main">
           <a:graphicData uri="http://schemas.openxmlformats.org/drawingml/2006/chart">
-            <c:chart xmlns:r="http://schemas.openxmlformats.org/officeDocument/2006/relationships" xmlns:c="http://schemas.openxmlformats.org/drawingml/2006/chart" r:id="R26f26f9dd46f49e3"/>
+            <c:chart xmlns:r="http://schemas.openxmlformats.org/officeDocument/2006/relationships" xmlns:c="http://schemas.openxmlformats.org/drawingml/2006/chart" r:id="Ref73fe50bbe644d1"/>
           </a:graphicData>
         </a:graphic>
       </p:graphicFrame>
       <p:graphicFrame>
         <p:nvGraphicFramePr>
-          <p:cNvPr id="10004" name="bar + line"/>
+          <p:cNvPr id="100004" name="bar + line"/>
           <p:cNvGraphicFramePr/>
           <p:nvPr/>
         </p:nvGraphicFramePr>
@@ -6915,7 +7004,7 @@
         </p:xfrm>
         <a:graphic xmlns:a="http://schemas.openxmlformats.org/drawingml/2006/main">
           <a:graphicData uri="http://schemas.openxmlformats.org/drawingml/2006/chart">
-            <c:chart xmlns:r="http://schemas.openxmlformats.org/officeDocument/2006/relationships" xmlns:c="http://schemas.openxmlformats.org/drawingml/2006/chart" r:id="R4095cf41900b4928"/>
+            <c:chart xmlns:r="http://schemas.openxmlformats.org/officeDocument/2006/relationships" xmlns:c="http://schemas.openxmlformats.org/drawingml/2006/chart" r:id="R9675faad674c4c19"/>
           </a:graphicData>
         </a:graphic>
       </p:graphicFrame>
@@ -6936,8 +7025,8 @@
       <p:grpSpPr/>
       <p:sp>
         <p:nvSpPr>
-          <p:cNvPr id="10005" name="TextBox 1"/>
-          <p:cNvSpPr/>
+          <p:cNvPr id="100005" name="TextBox 1"/>
+          <p:cNvSpPr txBox="1"/>
           <p:nvPr/>
         </p:nvSpPr>
         <p:spPr>
@@ -6964,7 +7053,7 @@
       </p:sp>
       <p:graphicFrame>
         <p:nvGraphicFramePr>
-          <p:cNvPr id="10006" name="combosplit=2 (2 columns + 1 line)"/>
+          <p:cNvPr id="100006" name="combosplit=2 (2 columns + 1 line)"/>
           <p:cNvGraphicFramePr/>
           <p:nvPr/>
         </p:nvGraphicFramePr>
@@ -6974,13 +7063,13 @@
         </p:xfrm>
         <a:graphic xmlns:a="http://schemas.openxmlformats.org/drawingml/2006/main">
           <a:graphicData uri="http://schemas.openxmlformats.org/drawingml/2006/chart">
-            <c:chart xmlns:r="http://schemas.openxmlformats.org/officeDocument/2006/relationships" xmlns:c="http://schemas.openxmlformats.org/drawingml/2006/chart" r:id="Rb8c1e925fbad4763"/>
+            <c:chart xmlns:r="http://schemas.openxmlformats.org/officeDocument/2006/relationships" xmlns:c="http://schemas.openxmlformats.org/drawingml/2006/chart" r:id="R12518511eda24ecc"/>
           </a:graphicData>
         </a:graphic>
       </p:graphicFrame>
       <p:graphicFrame>
         <p:nvGraphicFramePr>
-          <p:cNvPr id="10007" name="combosplit=1 (1 column + 2 lines)"/>
+          <p:cNvPr id="100007" name="combosplit=1 (1 column + 2 lines)"/>
           <p:cNvGraphicFramePr/>
           <p:nvPr/>
         </p:nvGraphicFramePr>
@@ -6990,13 +7079,13 @@
         </p:xfrm>
         <a:graphic xmlns:a="http://schemas.openxmlformats.org/drawingml/2006/main">
           <a:graphicData uri="http://schemas.openxmlformats.org/drawingml/2006/chart">
-            <c:chart xmlns:r="http://schemas.openxmlformats.org/officeDocument/2006/relationships" xmlns:c="http://schemas.openxmlformats.org/drawingml/2006/chart" r:id="Ra8e3e437a9ac4bd4"/>
+            <c:chart xmlns:r="http://schemas.openxmlformats.org/officeDocument/2006/relationships" xmlns:c="http://schemas.openxmlformats.org/drawingml/2006/chart" r:id="R0318a1439b3b4955"/>
           </a:graphicData>
         </a:graphic>
       </p:graphicFrame>
       <p:graphicFrame>
         <p:nvGraphicFramePr>
-          <p:cNvPr id="10008" name="combosplit=2 (2 lines + 1 column)"/>
+          <p:cNvPr id="100008" name="combosplit=2 (2 lines + 1 column)"/>
           <p:cNvGraphicFramePr/>
           <p:nvPr/>
         </p:nvGraphicFramePr>
@@ -7006,13 +7095,13 @@
         </p:xfrm>
         <a:graphic xmlns:a="http://schemas.openxmlformats.org/drawingml/2006/main">
           <a:graphicData uri="http://schemas.openxmlformats.org/drawingml/2006/chart">
-            <c:chart xmlns:r="http://schemas.openxmlformats.org/officeDocument/2006/relationships" xmlns:c="http://schemas.openxmlformats.org/drawingml/2006/chart" r:id="Rd586554be9a14793"/>
+            <c:chart xmlns:r="http://schemas.openxmlformats.org/officeDocument/2006/relationships" xmlns:c="http://schemas.openxmlformats.org/drawingml/2006/chart" r:id="R830005c7a4fe4470"/>
           </a:graphicData>
         </a:graphic>
       </p:graphicFrame>
       <p:graphicFrame>
         <p:nvGraphicFramePr>
-          <p:cNvPr id="10009" name="area + column + line"/>
+          <p:cNvPr id="100009" name="area + column + line"/>
           <p:cNvGraphicFramePr/>
           <p:nvPr/>
         </p:nvGraphicFramePr>
@@ -7022,7 +7111,7 @@
         </p:xfrm>
         <a:graphic xmlns:a="http://schemas.openxmlformats.org/drawingml/2006/main">
           <a:graphicData uri="http://schemas.openxmlformats.org/drawingml/2006/chart">
-            <c:chart xmlns:r="http://schemas.openxmlformats.org/officeDocument/2006/relationships" xmlns:c="http://schemas.openxmlformats.org/drawingml/2006/chart" r:id="R20f4b032af53480f"/>
+            <c:chart xmlns:r="http://schemas.openxmlformats.org/officeDocument/2006/relationships" xmlns:c="http://schemas.openxmlformats.org/drawingml/2006/chart" r:id="R0bd4d38402424725"/>
           </a:graphicData>
         </a:graphic>
       </p:graphicFrame>
@@ -7043,8 +7132,8 @@
       <p:grpSpPr/>
       <p:sp>
         <p:nvSpPr>
-          <p:cNvPr id="10010" name="TextBox 1"/>
-          <p:cNvSpPr/>
+          <p:cNvPr id="100010" name="TextBox 1"/>
+          <p:cNvSpPr txBox="1"/>
           <p:nvPr/>
         </p:nvSpPr>
         <p:spPr>
@@ -7071,7 +7160,7 @@
       </p:sp>
       <p:graphicFrame>
         <p:nvGraphicFramePr>
-          <p:cNvPr id="10011" name="secondaryaxis=2"/>
+          <p:cNvPr id="100011" name="secondaryaxis=2"/>
           <p:cNvGraphicFramePr/>
           <p:nvPr/>
         </p:nvGraphicFramePr>
@@ -7081,13 +7170,13 @@
         </p:xfrm>
         <a:graphic xmlns:a="http://schemas.openxmlformats.org/drawingml/2006/main">
           <a:graphicData uri="http://schemas.openxmlformats.org/drawingml/2006/chart">
-            <c:chart xmlns:r="http://schemas.openxmlformats.org/officeDocument/2006/relationships" xmlns:c="http://schemas.openxmlformats.org/drawingml/2006/chart" r:id="R8be250935a4646e9"/>
+            <c:chart xmlns:r="http://schemas.openxmlformats.org/officeDocument/2006/relationships" xmlns:c="http://schemas.openxmlformats.org/drawingml/2006/chart" r:id="Rebd81fa5df344f71"/>
           </a:graphicData>
         </a:graphic>
       </p:graphicFrame>
       <p:graphicFrame>
         <p:nvGraphicFramePr>
-          <p:cNvPr id="10012" name="secondaryaxis=3 (Growth on right)"/>
+          <p:cNvPr id="100012" name="secondaryaxis=3 (Growth on right)"/>
           <p:cNvGraphicFramePr/>
           <p:nvPr/>
         </p:nvGraphicFramePr>
@@ -7097,13 +7186,13 @@
         </p:xfrm>
         <a:graphic xmlns:a="http://schemas.openxmlformats.org/drawingml/2006/main">
           <a:graphicData uri="http://schemas.openxmlformats.org/drawingml/2006/chart">
-            <c:chart xmlns:r="http://schemas.openxmlformats.org/officeDocument/2006/relationships" xmlns:c="http://schemas.openxmlformats.org/drawingml/2006/chart" r:id="Rec5d2969fb874e91"/>
+            <c:chart xmlns:r="http://schemas.openxmlformats.org/officeDocument/2006/relationships" xmlns:c="http://schemas.openxmlformats.org/drawingml/2006/chart" r:id="R6cf0baca3b894669"/>
           </a:graphicData>
         </a:graphic>
       </p:graphicFrame>
       <p:graphicFrame>
         <p:nvGraphicFramePr>
-          <p:cNvPr id="10013" name="secondaryaxis=2,3"/>
+          <p:cNvPr id="100013" name="secondaryaxis=2,3"/>
           <p:cNvGraphicFramePr/>
           <p:nvPr/>
         </p:nvGraphicFramePr>
@@ -7113,13 +7202,13 @@
         </p:xfrm>
         <a:graphic xmlns:a="http://schemas.openxmlformats.org/drawingml/2006/main">
           <a:graphicData uri="http://schemas.openxmlformats.org/drawingml/2006/chart">
-            <c:chart xmlns:r="http://schemas.openxmlformats.org/officeDocument/2006/relationships" xmlns:c="http://schemas.openxmlformats.org/drawingml/2006/chart" r:id="R77444cb3f2384bd0"/>
+            <c:chart xmlns:r="http://schemas.openxmlformats.org/officeDocument/2006/relationships" xmlns:c="http://schemas.openxmlformats.org/drawingml/2006/chart" r:id="Rbd59e7c914c44957"/>
           </a:graphicData>
         </a:graphic>
       </p:graphicFrame>
       <p:graphicFrame>
         <p:nvGraphicFramePr>
-          <p:cNvPr id="10014" name="with grid + tick fonts"/>
+          <p:cNvPr id="100014" name="with grid + tick fonts"/>
           <p:cNvGraphicFramePr/>
           <p:nvPr/>
         </p:nvGraphicFramePr>
@@ -7129,7 +7218,7 @@
         </p:xfrm>
         <a:graphic xmlns:a="http://schemas.openxmlformats.org/drawingml/2006/main">
           <a:graphicData uri="http://schemas.openxmlformats.org/drawingml/2006/chart">
-            <c:chart xmlns:r="http://schemas.openxmlformats.org/officeDocument/2006/relationships" xmlns:c="http://schemas.openxmlformats.org/drawingml/2006/chart" r:id="R809f22c0ec684785"/>
+            <c:chart xmlns:r="http://schemas.openxmlformats.org/officeDocument/2006/relationships" xmlns:c="http://schemas.openxmlformats.org/drawingml/2006/chart" r:id="R54dc2838cb4743b0"/>
           </a:graphicData>
         </a:graphic>
       </p:graphicFrame>
@@ -7150,8 +7239,8 @@
       <p:grpSpPr/>
       <p:sp>
         <p:nvSpPr>
-          <p:cNvPr id="10015" name="TextBox 1"/>
-          <p:cNvSpPr/>
+          <p:cNvPr id="100015" name="TextBox 1"/>
+          <p:cNvSpPr txBox="1"/>
           <p:nvPr/>
         </p:nvSpPr>
         <p:spPr>
@@ -7178,7 +7267,7 @@
       </p:sp>
       <p:graphicFrame>
         <p:nvGraphicFramePr>
-          <p:cNvPr id="10016" name="Styled title"/>
+          <p:cNvPr id="100016" name="Styled title"/>
           <p:cNvGraphicFramePr/>
           <p:nvPr/>
         </p:nvGraphicFramePr>
@@ -7188,13 +7277,13 @@
         </p:xfrm>
         <a:graphic xmlns:a="http://schemas.openxmlformats.org/drawingml/2006/main">
           <a:graphicData uri="http://schemas.openxmlformats.org/drawingml/2006/chart">
-            <c:chart xmlns:r="http://schemas.openxmlformats.org/officeDocument/2006/relationships" xmlns:c="http://schemas.openxmlformats.org/drawingml/2006/chart" r:id="Rf7094a5574304636"/>
+            <c:chart xmlns:r="http://schemas.openxmlformats.org/officeDocument/2006/relationships" xmlns:c="http://schemas.openxmlformats.org/drawingml/2006/chart" r:id="Rebbfc4ffab4a4c8d"/>
           </a:graphicData>
         </a:graphic>
       </p:graphicFrame>
       <p:graphicFrame>
         <p:nvGraphicFramePr>
-          <p:cNvPr id="10017" name="legend=top + legendFont"/>
+          <p:cNvPr id="100017" name="legend=top + legendFont"/>
           <p:cNvGraphicFramePr/>
           <p:nvPr/>
         </p:nvGraphicFramePr>
@@ -7204,13 +7293,13 @@
         </p:xfrm>
         <a:graphic xmlns:a="http://schemas.openxmlformats.org/drawingml/2006/main">
           <a:graphicData uri="http://schemas.openxmlformats.org/drawingml/2006/chart">
-            <c:chart xmlns:r="http://schemas.openxmlformats.org/officeDocument/2006/relationships" xmlns:c="http://schemas.openxmlformats.org/drawingml/2006/chart" r:id="Rd55a503310b3441f"/>
+            <c:chart xmlns:r="http://schemas.openxmlformats.org/officeDocument/2006/relationships" xmlns:c="http://schemas.openxmlformats.org/drawingml/2006/chart" r:id="R913a7f5507c64e48"/>
           </a:graphicData>
         </a:graphic>
       </p:graphicFrame>
       <p:graphicFrame>
         <p:nvGraphicFramePr>
-          <p:cNvPr id="10018" name="legend.overlay=true"/>
+          <p:cNvPr id="100018" name="legend.overlay=true"/>
           <p:cNvGraphicFramePr/>
           <p:nvPr/>
         </p:nvGraphicFramePr>
@@ -7220,13 +7309,13 @@
         </p:xfrm>
         <a:graphic xmlns:a="http://schemas.openxmlformats.org/drawingml/2006/main">
           <a:graphicData uri="http://schemas.openxmlformats.org/drawingml/2006/chart">
-            <c:chart xmlns:r="http://schemas.openxmlformats.org/officeDocument/2006/relationships" xmlns:c="http://schemas.openxmlformats.org/drawingml/2006/chart" r:id="R7afaae250d144acd"/>
+            <c:chart xmlns:r="http://schemas.openxmlformats.org/officeDocument/2006/relationships" xmlns:c="http://schemas.openxmlformats.org/drawingml/2006/chart" r:id="R4b3b6085a1834597"/>
           </a:graphicData>
         </a:graphic>
       </p:graphicFrame>
       <p:graphicFrame>
         <p:nvGraphicFramePr>
-          <p:cNvPr id="10019" name="Chart 4"/>
+          <p:cNvPr id="100019" name="Chart 4"/>
           <p:cNvGraphicFramePr/>
           <p:nvPr/>
         </p:nvGraphicFramePr>
@@ -7236,7 +7325,7 @@
         </p:xfrm>
         <a:graphic xmlns:a="http://schemas.openxmlformats.org/drawingml/2006/main">
           <a:graphicData uri="http://schemas.openxmlformats.org/drawingml/2006/chart">
-            <c:chart xmlns:r="http://schemas.openxmlformats.org/officeDocument/2006/relationships" xmlns:c="http://schemas.openxmlformats.org/drawingml/2006/chart" r:id="R10956ad19a094418"/>
+            <c:chart xmlns:r="http://schemas.openxmlformats.org/officeDocument/2006/relationships" xmlns:c="http://schemas.openxmlformats.org/drawingml/2006/chart" r:id="Rf722baf545f3409f"/>
           </a:graphicData>
         </a:graphic>
       </p:graphicFrame>
@@ -7257,8 +7346,8 @@
       <p:grpSpPr/>
       <p:sp>
         <p:nvSpPr>
-          <p:cNvPr id="10020" name="TextBox 1"/>
-          <p:cNvSpPr/>
+          <p:cNvPr id="100020" name="TextBox 1"/>
+          <p:cNvSpPr txBox="1"/>
           <p:nvPr/>
         </p:nvSpPr>
         <p:spPr>
@@ -7285,7 +7374,7 @@
       </p:sp>
       <p:graphicFrame>
         <p:nvGraphicFramePr>
-          <p:cNvPr id="10021" name="dataLabels=value"/>
+          <p:cNvPr id="100021" name="dataLabels=value"/>
           <p:cNvGraphicFramePr/>
           <p:nvPr/>
         </p:nvGraphicFramePr>
@@ -7295,13 +7384,13 @@
         </p:xfrm>
         <a:graphic xmlns:a="http://schemas.openxmlformats.org/drawingml/2006/main">
           <a:graphicData uri="http://schemas.openxmlformats.org/drawingml/2006/chart">
-            <c:chart xmlns:r="http://schemas.openxmlformats.org/officeDocument/2006/relationships" xmlns:c="http://schemas.openxmlformats.org/drawingml/2006/chart" r:id="R69c25578689a474d"/>
+            <c:chart xmlns:r="http://schemas.openxmlformats.org/officeDocument/2006/relationships" xmlns:c="http://schemas.openxmlformats.org/drawingml/2006/chart" r:id="R3c586232823444d6"/>
           </a:graphicData>
         </a:graphic>
       </p:graphicFrame>
       <p:graphicFrame>
         <p:nvGraphicFramePr>
-          <p:cNvPr id="10022" name="value,series"/>
+          <p:cNvPr id="100022" name="value,series"/>
           <p:cNvGraphicFramePr/>
           <p:nvPr/>
         </p:nvGraphicFramePr>
@@ -7311,13 +7400,13 @@
         </p:xfrm>
         <a:graphic xmlns:a="http://schemas.openxmlformats.org/drawingml/2006/main">
           <a:graphicData uri="http://schemas.openxmlformats.org/drawingml/2006/chart">
-            <c:chart xmlns:r="http://schemas.openxmlformats.org/officeDocument/2006/relationships" xmlns:c="http://schemas.openxmlformats.org/drawingml/2006/chart" r:id="R01cbd875f49b4013"/>
+            <c:chart xmlns:r="http://schemas.openxmlformats.org/officeDocument/2006/relationships" xmlns:c="http://schemas.openxmlformats.org/drawingml/2006/chart" r:id="R66d23f187a67493c"/>
           </a:graphicData>
         </a:graphic>
       </p:graphicFrame>
       <p:graphicFrame>
         <p:nvGraphicFramePr>
-          <p:cNvPr id="10023" name="dataLabels=none"/>
+          <p:cNvPr id="100023" name="dataLabels=none"/>
           <p:cNvGraphicFramePr/>
           <p:nvPr/>
         </p:nvGraphicFramePr>
@@ -7327,13 +7416,13 @@
         </p:xfrm>
         <a:graphic xmlns:a="http://schemas.openxmlformats.org/drawingml/2006/main">
           <a:graphicData uri="http://schemas.openxmlformats.org/drawingml/2006/chart">
-            <c:chart xmlns:r="http://schemas.openxmlformats.org/officeDocument/2006/relationships" xmlns:c="http://schemas.openxmlformats.org/drawingml/2006/chart" r:id="Re5ea97dddfc54e38"/>
+            <c:chart xmlns:r="http://schemas.openxmlformats.org/officeDocument/2006/relationships" xmlns:c="http://schemas.openxmlformats.org/drawingml/2006/chart" r:id="Ra98af6d537ae4f34"/>
           </a:graphicData>
         </a:graphic>
       </p:graphicFrame>
       <p:graphicFrame>
         <p:nvGraphicFramePr>
-          <p:cNvPr id="10024" name="labelfont styled"/>
+          <p:cNvPr id="100024" name="labelfont styled"/>
           <p:cNvGraphicFramePr/>
           <p:nvPr/>
         </p:nvGraphicFramePr>
@@ -7343,7 +7432,7 @@
         </p:xfrm>
         <a:graphic xmlns:a="http://schemas.openxmlformats.org/drawingml/2006/main">
           <a:graphicData uri="http://schemas.openxmlformats.org/drawingml/2006/chart">
-            <c:chart xmlns:r="http://schemas.openxmlformats.org/officeDocument/2006/relationships" xmlns:c="http://schemas.openxmlformats.org/drawingml/2006/chart" r:id="Ra62091873bca4c0a"/>
+            <c:chart xmlns:r="http://schemas.openxmlformats.org/officeDocument/2006/relationships" xmlns:c="http://schemas.openxmlformats.org/drawingml/2006/chart" r:id="R4ee94454ef9f4284"/>
           </a:graphicData>
         </a:graphic>
       </p:graphicFrame>
@@ -7364,8 +7453,8 @@
       <p:grpSpPr/>
       <p:sp>
         <p:nvSpPr>
-          <p:cNvPr id="10025" name="TextBox 1"/>
-          <p:cNvSpPr/>
+          <p:cNvPr id="100025" name="TextBox 1"/>
+          <p:cNvSpPr txBox="1"/>
           <p:nvPr/>
         </p:nvSpPr>
         <p:spPr>
@@ -7392,7 +7481,7 @@
       </p:sp>
       <p:graphicFrame>
         <p:nvGraphicFramePr>
-          <p:cNvPr id="10026" name="both axes min/max"/>
+          <p:cNvPr id="100026" name="both axes min/max"/>
           <p:cNvGraphicFramePr/>
           <p:nvPr/>
         </p:nvGraphicFramePr>
@@ -7402,13 +7491,13 @@
         </p:xfrm>
         <a:graphic xmlns:a="http://schemas.openxmlformats.org/drawingml/2006/main">
           <a:graphicData uri="http://schemas.openxmlformats.org/drawingml/2006/chart">
-            <c:chart xmlns:r="http://schemas.openxmlformats.org/officeDocument/2006/relationships" xmlns:c="http://schemas.openxmlformats.org/drawingml/2006/chart" r:id="Rc34487fc863f402d"/>
+            <c:chart xmlns:r="http://schemas.openxmlformats.org/officeDocument/2006/relationships" xmlns:c="http://schemas.openxmlformats.org/drawingml/2006/chart" r:id="Rd3f0e18f71a246e2"/>
           </a:graphicData>
         </a:graphic>
       </p:graphicFrame>
       <p:graphicFrame>
         <p:nvGraphicFramePr>
-          <p:cNvPr id="10027" name="gridlines + minorGridlines"/>
+          <p:cNvPr id="100027" name="gridlines + minorGridlines"/>
           <p:cNvGraphicFramePr/>
           <p:nvPr/>
         </p:nvGraphicFramePr>
@@ -7418,13 +7507,13 @@
         </p:xfrm>
         <a:graphic xmlns:a="http://schemas.openxmlformats.org/drawingml/2006/main">
           <a:graphicData uri="http://schemas.openxmlformats.org/drawingml/2006/chart">
-            <c:chart xmlns:r="http://schemas.openxmlformats.org/officeDocument/2006/relationships" xmlns:c="http://schemas.openxmlformats.org/drawingml/2006/chart" r:id="R5293a47e76be4ba8"/>
+            <c:chart xmlns:r="http://schemas.openxmlformats.org/officeDocument/2006/relationships" xmlns:c="http://schemas.openxmlformats.org/drawingml/2006/chart" r:id="R49819861a80a48b4"/>
           </a:graphicData>
         </a:graphic>
       </p:graphicFrame>
       <p:graphicFrame>
         <p:nvGraphicFramePr>
-          <p:cNvPr id="10028" name="labelrotation=-30"/>
+          <p:cNvPr id="100028" name="labelrotation=-30"/>
           <p:cNvGraphicFramePr/>
           <p:nvPr/>
         </p:nvGraphicFramePr>
@@ -7434,13 +7523,13 @@
         </p:xfrm>
         <a:graphic xmlns:a="http://schemas.openxmlformats.org/drawingml/2006/main">
           <a:graphicData uri="http://schemas.openxmlformats.org/drawingml/2006/chart">
-            <c:chart xmlns:r="http://schemas.openxmlformats.org/officeDocument/2006/relationships" xmlns:c="http://schemas.openxmlformats.org/drawingml/2006/chart" r:id="Rb2e0278615b64961"/>
+            <c:chart xmlns:r="http://schemas.openxmlformats.org/officeDocument/2006/relationships" xmlns:c="http://schemas.openxmlformats.org/drawingml/2006/chart" r:id="R693656b3d01f4690"/>
           </a:graphicData>
         </a:graphic>
       </p:graphicFrame>
       <p:graphicFrame>
         <p:nvGraphicFramePr>
-          <p:cNvPr id="10029" name="chart-axis Set after add"/>
+          <p:cNvPr id="100029" name="chart-axis Set after add"/>
           <p:cNvGraphicFramePr/>
           <p:nvPr/>
         </p:nvGraphicFramePr>
@@ -7450,7 +7539,7 @@
         </p:xfrm>
         <a:graphic xmlns:a="http://schemas.openxmlformats.org/drawingml/2006/main">
           <a:graphicData uri="http://schemas.openxmlformats.org/drawingml/2006/chart">
-            <c:chart xmlns:r="http://schemas.openxmlformats.org/officeDocument/2006/relationships" xmlns:c="http://schemas.openxmlformats.org/drawingml/2006/chart" r:id="R20c48a1d80404f64"/>
+            <c:chart xmlns:r="http://schemas.openxmlformats.org/officeDocument/2006/relationships" xmlns:c="http://schemas.openxmlformats.org/drawingml/2006/chart" r:id="R1b9348d89ec14e7b"/>
           </a:graphicData>
         </a:graphic>
       </p:graphicFrame>
@@ -7471,8 +7560,8 @@
       <p:grpSpPr/>
       <p:sp>
         <p:nvSpPr>
-          <p:cNvPr id="10030" name="TextBox 1"/>
-          <p:cNvSpPr/>
+          <p:cNvPr id="100030" name="TextBox 1"/>
+          <p:cNvSpPr txBox="1"/>
           <p:nvPr/>
         </p:nvSpPr>
         <p:spPr>
@@ -7499,7 +7588,7 @@
       </p:sp>
       <p:graphicFrame>
         <p:nvGraphicFramePr>
-          <p:cNvPr id="10031" name="colors + seriesoutline"/>
+          <p:cNvPr id="100031" name="colors + seriesoutline"/>
           <p:cNvGraphicFramePr/>
           <p:nvPr/>
         </p:nvGraphicFramePr>
@@ -7509,13 +7598,13 @@
         </p:xfrm>
         <a:graphic xmlns:a="http://schemas.openxmlformats.org/drawingml/2006/main">
           <a:graphicData uri="http://schemas.openxmlformats.org/drawingml/2006/chart">
-            <c:chart xmlns:r="http://schemas.openxmlformats.org/officeDocument/2006/relationships" xmlns:c="http://schemas.openxmlformats.org/drawingml/2006/chart" r:id="Rb89dfb4ac6ea4380"/>
+            <c:chart xmlns:r="http://schemas.openxmlformats.org/officeDocument/2006/relationships" xmlns:c="http://schemas.openxmlformats.org/drawingml/2006/chart" r:id="Rf1ea8a0c0b314b57"/>
           </a:graphicData>
         </a:graphic>
       </p:graphicFrame>
       <p:graphicFrame>
         <p:nvGraphicFramePr>
-          <p:cNvPr id="10032" name="gradient + seriesshadow"/>
+          <p:cNvPr id="100032" name="gradient + seriesshadow"/>
           <p:cNvGraphicFramePr/>
           <p:nvPr/>
         </p:nvGraphicFramePr>
@@ -7525,13 +7614,13 @@
         </p:xfrm>
         <a:graphic xmlns:a="http://schemas.openxmlformats.org/drawingml/2006/main">
           <a:graphicData uri="http://schemas.openxmlformats.org/drawingml/2006/chart">
-            <c:chart xmlns:r="http://schemas.openxmlformats.org/officeDocument/2006/relationships" xmlns:c="http://schemas.openxmlformats.org/drawingml/2006/chart" r:id="Ra4156011caea4077"/>
+            <c:chart xmlns:r="http://schemas.openxmlformats.org/officeDocument/2006/relationships" xmlns:c="http://schemas.openxmlformats.org/drawingml/2006/chart" r:id="Red8aea0a57a34379"/>
           </a:graphicData>
         </a:graphic>
       </p:graphicFrame>
       <p:graphicFrame>
         <p:nvGraphicFramePr>
-          <p:cNvPr id="10033" name="transparency=30"/>
+          <p:cNvPr id="100033" name="transparency=30"/>
           <p:cNvGraphicFramePr/>
           <p:nvPr/>
         </p:nvGraphicFramePr>
@@ -7541,13 +7630,13 @@
         </p:xfrm>
         <a:graphic xmlns:a="http://schemas.openxmlformats.org/drawingml/2006/main">
           <a:graphicData uri="http://schemas.openxmlformats.org/drawingml/2006/chart">
-            <c:chart xmlns:r="http://schemas.openxmlformats.org/officeDocument/2006/relationships" xmlns:c="http://schemas.openxmlformats.org/drawingml/2006/chart" r:id="R6fe062d44c914f9d"/>
+            <c:chart xmlns:r="http://schemas.openxmlformats.org/officeDocument/2006/relationships" xmlns:c="http://schemas.openxmlformats.org/drawingml/2006/chart" r:id="R6d1be79c89f640c5"/>
           </a:graphicData>
         </a:graphic>
       </p:graphicFrame>
       <p:graphicFrame>
         <p:nvGraphicFramePr>
-          <p:cNvPr id="10034" name="per-series gradients"/>
+          <p:cNvPr id="100034" name="per-series gradients"/>
           <p:cNvGraphicFramePr/>
           <p:nvPr/>
         </p:nvGraphicFramePr>
@@ -7557,7 +7646,7 @@
         </p:xfrm>
         <a:graphic xmlns:a="http://schemas.openxmlformats.org/drawingml/2006/main">
           <a:graphicData uri="http://schemas.openxmlformats.org/drawingml/2006/chart">
-            <c:chart xmlns:r="http://schemas.openxmlformats.org/officeDocument/2006/relationships" xmlns:c="http://schemas.openxmlformats.org/drawingml/2006/chart" r:id="Rfbf60040abed4456"/>
+            <c:chart xmlns:r="http://schemas.openxmlformats.org/officeDocument/2006/relationships" xmlns:c="http://schemas.openxmlformats.org/drawingml/2006/chart" r:id="R4fb54af18b374bfd"/>
           </a:graphicData>
         </a:graphic>
       </p:graphicFrame>
@@ -7578,8 +7667,8 @@
       <p:grpSpPr/>
       <p:sp>
         <p:nvSpPr>
-          <p:cNvPr id="10035" name="TextBox 1"/>
-          <p:cNvSpPr/>
+          <p:cNvPr id="100035" name="TextBox 1"/>
+          <p:cNvSpPr txBox="1"/>
           <p:nvPr/>
         </p:nvSpPr>
         <p:spPr>
@@ -7606,7 +7695,7 @@
       </p:sp>
       <p:graphicFrame>
         <p:nvGraphicFramePr>
-          <p:cNvPr id="10036" name="preset=minimal"/>
+          <p:cNvPr id="100036" name="preset=minimal"/>
           <p:cNvGraphicFramePr/>
           <p:nvPr/>
         </p:nvGraphicFramePr>
@@ -7616,13 +7705,13 @@
         </p:xfrm>
         <a:graphic xmlns:a="http://schemas.openxmlformats.org/drawingml/2006/main">
           <a:graphicData uri="http://schemas.openxmlformats.org/drawingml/2006/chart">
-            <c:chart xmlns:r="http://schemas.openxmlformats.org/officeDocument/2006/relationships" xmlns:c="http://schemas.openxmlformats.org/drawingml/2006/chart" r:id="R82d0ca72bf774745"/>
+            <c:chart xmlns:r="http://schemas.openxmlformats.org/officeDocument/2006/relationships" xmlns:c="http://schemas.openxmlformats.org/drawingml/2006/chart" r:id="R6936218eb209496f"/>
           </a:graphicData>
         </a:graphic>
       </p:graphicFrame>
       <p:graphicFrame>
         <p:nvGraphicFramePr>
-          <p:cNvPr id="10037" name="preset=dark"/>
+          <p:cNvPr id="100037" name="preset=dark"/>
           <p:cNvGraphicFramePr/>
           <p:nvPr/>
         </p:nvGraphicFramePr>
@@ -7632,13 +7721,13 @@
         </p:xfrm>
         <a:graphic xmlns:a="http://schemas.openxmlformats.org/drawingml/2006/main">
           <a:graphicData uri="http://schemas.openxmlformats.org/drawingml/2006/chart">
-            <c:chart xmlns:r="http://schemas.openxmlformats.org/officeDocument/2006/relationships" xmlns:c="http://schemas.openxmlformats.org/drawingml/2006/chart" r:id="R01550658ac2f4358"/>
+            <c:chart xmlns:r="http://schemas.openxmlformats.org/officeDocument/2006/relationships" xmlns:c="http://schemas.openxmlformats.org/drawingml/2006/chart" r:id="Rffaf74397f8448b2"/>
           </a:graphicData>
         </a:graphic>
       </p:graphicFrame>
       <p:graphicFrame>
         <p:nvGraphicFramePr>
-          <p:cNvPr id="10038" name="preset=corporate"/>
+          <p:cNvPr id="100038" name="preset=corporate"/>
           <p:cNvGraphicFramePr/>
           <p:nvPr/>
         </p:nvGraphicFramePr>
@@ -7648,13 +7737,13 @@
         </p:xfrm>
         <a:graphic xmlns:a="http://schemas.openxmlformats.org/drawingml/2006/main">
           <a:graphicData uri="http://schemas.openxmlformats.org/drawingml/2006/chart">
-            <c:chart xmlns:r="http://schemas.openxmlformats.org/officeDocument/2006/relationships" xmlns:c="http://schemas.openxmlformats.org/drawingml/2006/chart" r:id="R5f74c577bed24494"/>
+            <c:chart xmlns:r="http://schemas.openxmlformats.org/officeDocument/2006/relationships" xmlns:c="http://schemas.openxmlformats.org/drawingml/2006/chart" r:id="R61f77ad8b6994334"/>
           </a:graphicData>
         </a:graphic>
       </p:graphicFrame>
       <p:graphicFrame>
         <p:nvGraphicFramePr>
-          <p:cNvPr id="10039" name="chart-series Set"/>
+          <p:cNvPr id="100039" name="chart-series Set"/>
           <p:cNvGraphicFramePr/>
           <p:nvPr/>
         </p:nvGraphicFramePr>
@@ -7664,7 +7753,7 @@
         </p:xfrm>
         <a:graphic xmlns:a="http://schemas.openxmlformats.org/drawingml/2006/main">
           <a:graphicData uri="http://schemas.openxmlformats.org/drawingml/2006/chart">
-            <c:chart xmlns:r="http://schemas.openxmlformats.org/officeDocument/2006/relationships" xmlns:c="http://schemas.openxmlformats.org/drawingml/2006/chart" r:id="Rcb320bf9ca054e4c"/>
+            <c:chart xmlns:r="http://schemas.openxmlformats.org/officeDocument/2006/relationships" xmlns:c="http://schemas.openxmlformats.org/drawingml/2006/chart" r:id="R9b210ae8acc04931"/>
           </a:graphicData>
         </a:graphic>
       </p:graphicFrame>
